--- a/CSCI250-Fall2026/content/Week04_Intro-AI-ML-scikit-learn/slides.pptx
+++ b/CSCI250-Fall2026/content/Week04_Intro-AI-ML-scikit-learn/slides.pptx
@@ -4780,23 +4780,7 @@
                 </a:solidFill>
                 <a:latin typeface="Calibri"/>
               </a:rPr>
-              <a:t>✓ Post one takeaway in the Week 4 discussion</a:t>
-            </a:r>
-          </a:p>
-          <a:p>
-            <a:pPr>
-              <a:spcAft>
-                <a:spcPts val="1200"/>
-              </a:spcAft>
-            </a:pPr>
-            <a:r>
-              <a:rPr sz="2200">
-                <a:solidFill>
-                  <a:srgbClr val="FFFFFF"/>
-                </a:solidFill>
-                <a:latin typeface="Calibri"/>
-              </a:rPr>
-              <a:t>✓ No graded assignment — get ready for A5</a:t>
+              <a:t>✓ Submit Assignment A4 (6 pts, due Sun Sep 20)</a:t>
             </a:r>
           </a:p>
         </p:txBody>
@@ -5118,7 +5102,7 @@
                 </a:solidFill>
                 <a:latin typeface="Calibri"/>
               </a:rPr>
-              <a:t>– No graded assignment — but run both notebooks for A5 next week</a:t>
+              <a:t>– Lab: Assignment A4 (6 pts, due Sun Sep 20)</a:t>
             </a:r>
           </a:p>
         </p:txBody>
